--- a/docs/capstone/TradePilot-Sentinel-Capstone.pptx
+++ b/docs/capstone/TradePilot-Sentinel-Capstone.pptx
@@ -2138,7 +2138,7 @@
                   <a:srgbClr val="94A3B8"/>
                 </a:solidFill>
               </a:rPr>
-              <a:t>Agents for Business</a:t>
+              <a:t>Concierge Agents</a:t>
             </a:r>
           </a:p>
         </p:txBody>
